--- a/public/odeb/identite/modele-diaporama-odeb-lonodji.pptx
+++ b/public/odeb/identite/modele-diaporama-odeb-lonodji.pptx
@@ -2476,7 +2476,7 @@
         <p:spPr>
           <a:xfrm>
             <a:off x="1417320" y="1984248"/>
-            <a:ext cx="2372258" cy="548640"/>
+            <a:ext cx="2463698" cy="548640"/>
           </a:xfrm>
           <a:prstGeom prst="rect">
             <a:avLst/>
@@ -2703,7 +2703,7 @@
         <p:spPr>
           <a:xfrm>
             <a:off x="5206898" y="1984248"/>
-            <a:ext cx="2372258" cy="548640"/>
+            <a:ext cx="2463698" cy="548640"/>
           </a:xfrm>
           <a:prstGeom prst="rect">
             <a:avLst/>
@@ -2930,7 +2930,7 @@
         <p:spPr>
           <a:xfrm>
             <a:off x="8996477" y="1984248"/>
-            <a:ext cx="2372258" cy="548640"/>
+            <a:ext cx="2463698" cy="548640"/>
           </a:xfrm>
           <a:prstGeom prst="rect">
             <a:avLst/>
@@ -4569,7 +4569,7 @@
                 <a:ea typeface="Playfair Display" pitchFamily="34" charset="-122"/>
                 <a:cs typeface="Playfair Display" pitchFamily="34" charset="-120"/>
               </a:rPr>
-              <a:t>Sur les traces de nos ancêtres, bâtissons notre avenir.</a:t>
+              <a:t>Unité • Solidarité • Développement</a:t>
             </a:r>
             <a:endParaRPr lang="en-US" sz="3000" dirty="0"/>
           </a:p>
